--- a/system-design-101/vi/lessons/sd-04-038/slides/sd-04-038.pptx
+++ b/system-design-101/vi/lessons/sd-04-038/slides/sd-04-038.pptx
@@ -1710,17 +1710,17 @@
           <a:ln/>
         </p:spPr>
         <p:txBody>
-          <a:bodyPr wrap="square" lIns="0" tIns="74935" rIns="0" bIns="-74935" rtlCol="0" anchor="t"/>
+          <a:bodyPr wrap="square" lIns="0" tIns="69437" rIns="0" bIns="-69437" rtlCol="0" anchor="t"/>
           <a:lstStyle/>
           <a:p>
             <a:pPr algn="l" indent="0" marL="0">
               <a:lnSpc>
-                <a:spcPts val="9174"/>
+                <a:spcPts val="8505"/>
               </a:lnSpc>
               <a:buNone/>
             </a:pPr>
             <a:r>
-              <a:rPr lang="en-US" sz="8738" dirty="0" spc="2" kern="0">
+              <a:rPr lang="en-US" sz="8100" dirty="0" spc="4" kern="0">
                 <a:solidFill>
                   <a:srgbClr val="F3EEE3"/>
                 </a:solidFill>
@@ -1731,7 +1731,7 @@
               <a:t>Định</a:t>
             </a:r>
             <a:r>
-              <a:rPr lang="en-US" sz="8738" dirty="0" spc="-3" kern="0">
+              <a:rPr lang="en-US" sz="8100" dirty="0" spc="-2" kern="0">
                 <a:solidFill>
                   <a:srgbClr val="F3EEE3"/>
                 </a:solidFill>
@@ -1742,7 +1742,7 @@
               <a:t> lý</a:t>
             </a:r>
             <a:r>
-              <a:rPr lang="en-US" sz="8738" dirty="0" spc="-55" kern="0">
+              <a:rPr lang="en-US" sz="8100" dirty="0" spc="-51" kern="0">
                 <a:solidFill>
                   <a:srgbClr val="F3EEE3"/>
                 </a:solidFill>
@@ -1752,7 +1752,7 @@
               </a:rPr>
               <a:t> CAP</a:t>
             </a:r>
-            <a:endParaRPr lang="en-US" sz="8738" dirty="0"/>
+            <a:endParaRPr lang="en-US" sz="8100" dirty="0"/>
           </a:p>
         </p:txBody>
       </p:sp>
@@ -4390,7 +4390,7 @@
               <a:buNone/>
             </a:pPr>
             <a:r>
-              <a:rPr lang="en-US" sz="6600" dirty="0" spc="-1" kern="0">
+              <a:rPr lang="en-US" sz="6900" dirty="0" spc="1" kern="0">
                 <a:solidFill>
                   <a:srgbClr val="14161C"/>
                 </a:solidFill>
@@ -4401,7 +4401,7 @@
               <a:t>Không</a:t>
             </a:r>
             <a:r>
-              <a:rPr lang="en-US" sz="6600" dirty="0" spc="11" kern="0">
+              <a:rPr lang="en-US" sz="6900" dirty="0" spc="11" kern="0">
                 <a:solidFill>
                   <a:srgbClr val="14161C"/>
                 </a:solidFill>
@@ -4412,7 +4412,7 @@
               <a:t> đồng</a:t>
             </a:r>
             <a:r>
-              <a:rPr lang="en-US" sz="6600" dirty="0" spc="-1" kern="0">
+              <a:rPr lang="en-US" sz="6900" dirty="0" spc="-4" kern="0">
                 <a:solidFill>
                   <a:srgbClr val="14161C"/>
                 </a:solidFill>
@@ -4420,10 +4420,10 @@
                 <a:ea typeface="Bricolage Grotesque ExtraBold" pitchFamily="34" charset="-122"/>
                 <a:cs typeface="Bricolage Grotesque ExtraBold" pitchFamily="34" charset="-120"/>
               </a:rPr>
-              <a:t> bộ: chọn</a:t>
-            </a:r>
-            <a:r>
-              <a:rPr lang="en-US" sz="6600" dirty="0" spc="-27" kern="0">
+              <a:t> bộ:</a:t>
+            </a:r>
+            <a:r>
+              <a:rPr lang="en-US" sz="6900" dirty="0" spc="0" kern="0">
                 <a:solidFill>
                   <a:srgbClr val="14161C"/>
                 </a:solidFill>
@@ -4431,10 +4431,10 @@
                 <a:ea typeface="Bricolage Grotesque ExtraBold" pitchFamily="34" charset="-122"/>
                 <a:cs typeface="Bricolage Grotesque ExtraBold" pitchFamily="34" charset="-120"/>
               </a:rPr>
-              <a:t> trả</a:t>
-            </a:r>
-            <a:r>
-              <a:rPr lang="en-US" sz="6600" dirty="0" spc="-33" kern="0">
+              <a:t> chọn</a:t>
+            </a:r>
+            <a:r>
+              <a:rPr lang="en-US" sz="6900" dirty="0" spc="-30" kern="0">
                 <a:solidFill>
                   <a:srgbClr val="14161C"/>
                 </a:solidFill>
@@ -4442,9 +4442,20 @@
                 <a:ea typeface="Bricolage Grotesque ExtraBold" pitchFamily="34" charset="-122"/>
                 <a:cs typeface="Bricolage Grotesque ExtraBold" pitchFamily="34" charset="-120"/>
               </a:rPr>
+              <a:t> trả</a:t>
+            </a:r>
+            <a:r>
+              <a:rPr lang="en-US" sz="6900" dirty="0" spc="-32" kern="0">
+                <a:solidFill>
+                  <a:srgbClr val="14161C"/>
+                </a:solidFill>
+                <a:latin typeface="Bricolage Grotesque ExtraBold" pitchFamily="34" charset="0"/>
+                <a:ea typeface="Bricolage Grotesque ExtraBold" pitchFamily="34" charset="-122"/>
+                <a:cs typeface="Bricolage Grotesque ExtraBold" pitchFamily="34" charset="-120"/>
+              </a:rPr>
               <a:t> lời</a:t>
             </a:r>
-            <a:endParaRPr lang="en-US" sz="6600" dirty="0"/>
+            <a:endParaRPr lang="en-US" sz="6900" dirty="0"/>
           </a:p>
         </p:txBody>
       </p:sp>
@@ -5859,7 +5870,7 @@
               <a:buNone/>
             </a:pPr>
             <a:r>
-              <a:rPr lang="en-US" sz="5700" dirty="0" spc="1" kern="0">
+              <a:rPr lang="en-US" sz="6900" dirty="0" spc="1" kern="0">
                 <a:solidFill>
                   <a:srgbClr val="F3EEE3"/>
                 </a:solidFill>
@@ -5870,7 +5881,7 @@
               <a:t>Đồng</a:t>
             </a:r>
             <a:r>
-              <a:rPr lang="en-US" sz="5700" dirty="0" spc="-7" kern="0">
+              <a:rPr lang="en-US" sz="6900" dirty="0" spc="-4" kern="0">
                 <a:solidFill>
                   <a:srgbClr val="F3EEE3"/>
                 </a:solidFill>
@@ -5881,7 +5892,7 @@
               <a:t> bộ:</a:t>
             </a:r>
             <a:r>
-              <a:rPr lang="en-US" sz="5700" dirty="0" spc="2" kern="0">
+              <a:rPr lang="en-US" sz="6900" dirty="0" spc="2" kern="0">
                 <a:solidFill>
                   <a:srgbClr val="F3EEE3"/>
                 </a:solidFill>
@@ -5889,10 +5900,10 @@
                 <a:ea typeface="Bricolage Grotesque ExtraBold" pitchFamily="34" charset="-122"/>
                 <a:cs typeface="Bricolage Grotesque ExtraBold" pitchFamily="34" charset="-120"/>
               </a:rPr>
-              <a:t> lệnh</a:t>
-            </a:r>
-            <a:r>
-              <a:rPr lang="en-US" sz="5700" dirty="0" spc="-1" kern="0">
+              <a:t> ghi</a:t>
+            </a:r>
+            <a:r>
+              <a:rPr lang="en-US" sz="6900" dirty="0" spc="-60" kern="0">
                 <a:solidFill>
                   <a:srgbClr val="F3EEE3"/>
                 </a:solidFill>
@@ -5900,10 +5911,10 @@
                 <a:ea typeface="Bricolage Grotesque ExtraBold" pitchFamily="34" charset="-122"/>
                 <a:cs typeface="Bricolage Grotesque ExtraBold" pitchFamily="34" charset="-120"/>
               </a:rPr>
-              <a:t> ghi</a:t>
-            </a:r>
-            <a:r>
-              <a:rPr lang="en-US" sz="5700" dirty="0" spc="-49" kern="0">
+              <a:t> chờ,</a:t>
+            </a:r>
+            <a:r>
+              <a:rPr lang="en-US" sz="6900" dirty="0" spc="-56" kern="0">
                 <a:solidFill>
                   <a:srgbClr val="F3EEE3"/>
                 </a:solidFill>
@@ -5911,10 +5922,10 @@
                 <a:ea typeface="Bricolage Grotesque ExtraBold" pitchFamily="34" charset="-122"/>
                 <a:cs typeface="Bricolage Grotesque ExtraBold" pitchFamily="34" charset="-120"/>
               </a:rPr>
-              <a:t> chờ,</a:t>
-            </a:r>
-            <a:r>
-              <a:rPr lang="en-US" sz="5700" dirty="0" spc="-39" kern="0">
+              <a:t> vẫn</a:t>
+            </a:r>
+            <a:r>
+              <a:rPr lang="en-US" sz="6900" dirty="0" spc="-48" kern="0">
                 <a:solidFill>
                   <a:srgbClr val="F3EEE3"/>
                 </a:solidFill>
@@ -5925,7 +5936,7 @@
               <a:t> chưa</a:t>
             </a:r>
             <a:r>
-              <a:rPr lang="en-US" sz="5700" dirty="0" spc="1" kern="0">
+              <a:rPr lang="en-US" sz="6900" dirty="0" spc="1" kern="0">
                 <a:solidFill>
                   <a:srgbClr val="F3EEE3"/>
                 </a:solidFill>
@@ -5933,31 +5944,9 @@
                 <a:ea typeface="Bricolage Grotesque ExtraBold" pitchFamily="34" charset="-122"/>
                 <a:cs typeface="Bricolage Grotesque ExtraBold" pitchFamily="34" charset="-120"/>
               </a:rPr>
-              <a:t> phải</a:t>
-            </a:r>
-            <a:r>
-              <a:rPr lang="en-US" sz="5700" dirty="0" spc="-1" kern="0">
-                <a:solidFill>
-                  <a:srgbClr val="F3EEE3"/>
-                </a:solidFill>
-                <a:latin typeface="Bricolage Grotesque ExtraBold" pitchFamily="34" charset="0"/>
-                <a:ea typeface="Bricolage Grotesque ExtraBold" pitchFamily="34" charset="-122"/>
-                <a:cs typeface="Bricolage Grotesque ExtraBold" pitchFamily="34" charset="-120"/>
-              </a:rPr>
-              <a:t> chọn nhất</a:t>
-            </a:r>
-            <a:r>
-              <a:rPr lang="en-US" sz="5700" dirty="0" spc="-2" kern="0">
-                <a:solidFill>
-                  <a:srgbClr val="F3EEE3"/>
-                </a:solidFill>
-                <a:latin typeface="Bricolage Grotesque ExtraBold" pitchFamily="34" charset="0"/>
-                <a:ea typeface="Bricolage Grotesque ExtraBold" pitchFamily="34" charset="-122"/>
-                <a:cs typeface="Bricolage Grotesque ExtraBold" pitchFamily="34" charset="-120"/>
-              </a:rPr>
-              <a:t> quán</a:t>
-            </a:r>
-            <a:endParaRPr lang="en-US" sz="5700" dirty="0"/>
+              <a:t> nhất quán</a:t>
+            </a:r>
+            <a:endParaRPr lang="en-US" sz="6900" dirty="0"/>
           </a:p>
         </p:txBody>
       </p:sp>
@@ -7987,7 +7976,7 @@
               <a:buNone/>
             </a:pPr>
             <a:r>
-              <a:rPr lang="en-US" sz="6600" dirty="0" spc="-1" kern="0">
+              <a:rPr lang="en-US" sz="6900" dirty="0" spc="1" kern="0">
                 <a:solidFill>
                   <a:srgbClr val="14161C"/>
                 </a:solidFill>
@@ -7998,7 +7987,7 @@
               <a:t>Không</a:t>
             </a:r>
             <a:r>
-              <a:rPr lang="en-US" sz="6600" dirty="0" spc="1" kern="0">
+              <a:rPr lang="en-US" sz="6900" dirty="0" spc="3" kern="0">
                 <a:solidFill>
                   <a:srgbClr val="14161C"/>
                 </a:solidFill>
@@ -8009,7 +7998,7 @@
               <a:t> phân</a:t>
             </a:r>
             <a:r>
-              <a:rPr lang="en-US" sz="6600" dirty="0" spc="3" kern="0">
+              <a:rPr lang="en-US" sz="6900" dirty="0" spc="4" kern="0">
                 <a:solidFill>
                   <a:srgbClr val="14161C"/>
                 </a:solidFill>
@@ -8020,7 +8009,7 @@
               <a:t> vùng:</a:t>
             </a:r>
             <a:r>
-              <a:rPr lang="en-US" sz="6600" dirty="0" spc="-27" kern="0">
+              <a:rPr lang="en-US" sz="6900" dirty="0" spc="-30" kern="0">
                 <a:solidFill>
                   <a:srgbClr val="14161C"/>
                 </a:solidFill>
@@ -8031,7 +8020,7 @@
               <a:t> trả</a:t>
             </a:r>
             <a:r>
-              <a:rPr lang="en-US" sz="6600" dirty="0" spc="-3" kern="0">
+              <a:rPr lang="en-US" sz="6900" dirty="0" spc="-3" kern="0">
                 <a:solidFill>
                   <a:srgbClr val="14161C"/>
                 </a:solidFill>
@@ -8042,7 +8031,7 @@
               <a:t> bằng</a:t>
             </a:r>
             <a:r>
-              <a:rPr lang="en-US" sz="6600" dirty="0" spc="19" kern="0">
+              <a:rPr lang="en-US" sz="6900" dirty="0" spc="17" kern="0">
                 <a:solidFill>
                   <a:srgbClr val="14161C"/>
                 </a:solidFill>
@@ -8053,7 +8042,7 @@
               <a:t> độ</a:t>
             </a:r>
             <a:r>
-              <a:rPr lang="en-US" sz="6600" dirty="0" spc="-19" kern="0">
+              <a:rPr lang="en-US" sz="6900" dirty="0" spc="-19" kern="0">
                 <a:solidFill>
                   <a:srgbClr val="14161C"/>
                 </a:solidFill>
@@ -8063,7 +8052,7 @@
               </a:rPr>
               <a:t> trễ</a:t>
             </a:r>
-            <a:endParaRPr lang="en-US" sz="6600" dirty="0"/>
+            <a:endParaRPr lang="en-US" sz="6900" dirty="0"/>
           </a:p>
         </p:txBody>
       </p:sp>
@@ -9428,7 +9417,7 @@
               <a:buNone/>
             </a:pPr>
             <a:r>
-              <a:rPr lang="en-US" sz="6000" dirty="0" spc="-15" kern="0">
+              <a:rPr lang="en-US" sz="6900" dirty="0" spc="-14" kern="0">
                 <a:solidFill>
                   <a:srgbClr val="F3EEE3"/>
                 </a:solidFill>
@@ -9439,7 +9428,7 @@
               <a:t>Một</a:t>
             </a:r>
             <a:r>
-              <a:rPr lang="en-US" sz="6000" dirty="0" spc="2" kern="0">
+              <a:rPr lang="en-US" sz="6900" dirty="0" spc="6" kern="0">
                 <a:solidFill>
                   <a:srgbClr val="F3EEE3"/>
                 </a:solidFill>
@@ -9450,7 +9439,7 @@
               <a:t> phép</a:t>
             </a:r>
             <a:r>
-              <a:rPr lang="en-US" sz="6000" dirty="0" spc="-36" kern="0">
+              <a:rPr lang="en-US" sz="6900" dirty="0" spc="-41" kern="0">
                 <a:solidFill>
                   <a:srgbClr val="F3EEE3"/>
                 </a:solidFill>
@@ -9461,7 +9450,7 @@
               <a:t> thử,</a:t>
             </a:r>
             <a:r>
-              <a:rPr lang="en-US" sz="6000" dirty="0" spc="-41" kern="0">
+              <a:rPr lang="en-US" sz="6900" dirty="0" spc="-47" kern="0">
                 <a:solidFill>
                   <a:srgbClr val="F3EEE3"/>
                 </a:solidFill>
@@ -9472,7 +9461,7 @@
               <a:t> chưa</a:t>
             </a:r>
             <a:r>
-              <a:rPr lang="en-US" sz="6000" dirty="0" spc="3" kern="0">
+              <a:rPr lang="en-US" sz="6900" dirty="0" spc="4" kern="0">
                 <a:solidFill>
                   <a:srgbClr val="F3EEE3"/>
                 </a:solidFill>
@@ -9483,7 +9472,7 @@
               <a:t> phải</a:t>
             </a:r>
             <a:r>
-              <a:rPr lang="en-US" sz="6000" dirty="0" spc="-1" kern="0">
+              <a:rPr lang="en-US" sz="6900" dirty="0" spc="3" kern="0">
                 <a:solidFill>
                   <a:srgbClr val="F3EEE3"/>
                 </a:solidFill>
@@ -9494,7 +9483,7 @@
               <a:t> hệ</a:t>
             </a:r>
             <a:r>
-              <a:rPr lang="en-US" sz="6000" dirty="0" spc="-2" kern="0">
+              <a:rPr lang="en-US" sz="6900" dirty="0" spc="0" kern="0">
                 <a:solidFill>
                   <a:srgbClr val="F3EEE3"/>
                 </a:solidFill>
@@ -9504,7 +9493,7 @@
               </a:rPr>
               <a:t> thật</a:t>
             </a:r>
-            <a:endParaRPr lang="en-US" sz="6000" dirty="0"/>
+            <a:endParaRPr lang="en-US" sz="6900" dirty="0"/>
           </a:p>
         </p:txBody>
       </p:sp>
@@ -11219,7 +11208,7 @@
         <p:spPr>
           <a:xfrm>
             <a:off x="914400" y="1333500"/>
-            <a:ext cx="16459200" cy="1047750"/>
+            <a:ext cx="16459200" cy="1143000"/>
           </a:xfrm>
           <a:prstGeom prst="rect">
             <a:avLst/>
@@ -11235,7 +11224,7 @@
               <a:buNone/>
             </a:pPr>
             <a:r>
-              <a:rPr lang="en-US" sz="5700" dirty="0" spc="1" kern="0">
+              <a:rPr lang="en-US" sz="6900" dirty="0" spc="-2" kern="0">
                 <a:solidFill>
                   <a:srgbClr val="14161C"/>
                 </a:solidFill>
@@ -11246,7 +11235,7 @@
               <a:t>Hủy</a:t>
             </a:r>
             <a:r>
-              <a:rPr lang="en-US" sz="5700" dirty="0" spc="2" kern="0">
+              <a:rPr lang="en-US" sz="6900" dirty="0" spc="6" kern="0">
                 <a:solidFill>
                   <a:srgbClr val="14161C"/>
                 </a:solidFill>
@@ -11257,7 +11246,7 @@
               <a:t> lệnh</a:t>
             </a:r>
             <a:r>
-              <a:rPr lang="en-US" sz="5700" dirty="0" spc="5" kern="0">
+              <a:rPr lang="en-US" sz="6900" dirty="0" spc="-15" kern="0">
                 <a:solidFill>
                   <a:srgbClr val="14161C"/>
                 </a:solidFill>
@@ -11265,10 +11254,10 @@
                 <a:ea typeface="Bricolage Grotesque ExtraBold" pitchFamily="34" charset="-122"/>
                 <a:cs typeface="Bricolage Grotesque ExtraBold" pitchFamily="34" charset="-120"/>
               </a:rPr>
-              <a:t> đặt</a:t>
-            </a:r>
-            <a:r>
-              <a:rPr lang="en-US" sz="5700" dirty="0" spc="1" kern="0">
+              <a:t> treo:</a:t>
+            </a:r>
+            <a:r>
+              <a:rPr lang="en-US" sz="6900" dirty="0" spc="-31" kern="0">
                 <a:solidFill>
                   <a:srgbClr val="14161C"/>
                 </a:solidFill>
@@ -11276,10 +11265,10 @@
                 <a:ea typeface="Bricolage Grotesque ExtraBold" pitchFamily="34" charset="-122"/>
                 <a:cs typeface="Bricolage Grotesque ExtraBold" pitchFamily="34" charset="-120"/>
               </a:rPr>
-              <a:t> hàng</a:t>
-            </a:r>
-            <a:r>
-              <a:rPr lang="en-US" sz="5700" dirty="0" spc="6" kern="0">
+              <a:t> đơn</a:t>
+            </a:r>
+            <a:r>
+              <a:rPr lang="en-US" sz="6900" dirty="0" spc="2" kern="0">
                 <a:solidFill>
                   <a:srgbClr val="14161C"/>
                 </a:solidFill>
@@ -11287,10 +11276,10 @@
                 <a:ea typeface="Bricolage Grotesque ExtraBold" pitchFamily="34" charset="-122"/>
                 <a:cs typeface="Bricolage Grotesque ExtraBold" pitchFamily="34" charset="-120"/>
               </a:rPr>
-              <a:t> đang</a:t>
-            </a:r>
-            <a:r>
-              <a:rPr lang="en-US" sz="5700" dirty="0" spc="-15" kern="0">
+              <a:t> hàng</a:t>
+            </a:r>
+            <a:r>
+              <a:rPr lang="en-US" sz="6900" dirty="0" spc="0" kern="0">
                 <a:solidFill>
                   <a:srgbClr val="14161C"/>
                 </a:solidFill>
@@ -11298,10 +11287,10 @@
                 <a:ea typeface="Bricolage Grotesque ExtraBold" pitchFamily="34" charset="-122"/>
                 <a:cs typeface="Bricolage Grotesque ExtraBold" pitchFamily="34" charset="-120"/>
               </a:rPr>
-              <a:t> treo:</a:t>
-            </a:r>
-            <a:r>
-              <a:rPr lang="en-US" sz="5700" dirty="0" spc="-24" kern="0">
+              <a:t> còn</a:t>
+            </a:r>
+            <a:r>
+              <a:rPr lang="en-US" sz="6900" dirty="0" spc="-1" kern="0">
                 <a:solidFill>
                   <a:srgbClr val="14161C"/>
                 </a:solidFill>
@@ -11309,31 +11298,9 @@
                 <a:ea typeface="Bricolage Grotesque ExtraBold" pitchFamily="34" charset="-122"/>
                 <a:cs typeface="Bricolage Grotesque ExtraBold" pitchFamily="34" charset="-120"/>
               </a:rPr>
-              <a:t> đơn</a:t>
-            </a:r>
-            <a:r>
-              <a:rPr lang="en-US" sz="5700" dirty="0" spc="-3" kern="0">
-                <a:solidFill>
-                  <a:srgbClr val="14161C"/>
-                </a:solidFill>
-                <a:latin typeface="Bricolage Grotesque ExtraBold" pitchFamily="34" charset="0"/>
-                <a:ea typeface="Bricolage Grotesque ExtraBold" pitchFamily="34" charset="-122"/>
-                <a:cs typeface="Bricolage Grotesque ExtraBold" pitchFamily="34" charset="-120"/>
-              </a:rPr>
-              <a:t> còn</a:t>
-            </a:r>
-            <a:r>
-              <a:rPr lang="en-US" sz="5700" dirty="0" spc="-1" kern="0">
-                <a:solidFill>
-                  <a:srgbClr val="14161C"/>
-                </a:solidFill>
-                <a:latin typeface="Bricolage Grotesque ExtraBold" pitchFamily="34" charset="0"/>
-                <a:ea typeface="Bricolage Grotesque ExtraBold" pitchFamily="34" charset="-122"/>
-                <a:cs typeface="Bricolage Grotesque ExtraBold" pitchFamily="34" charset="-120"/>
-              </a:rPr>
               <a:t> không?</a:t>
             </a:r>
-            <a:endParaRPr lang="en-US" sz="5700" dirty="0"/>
+            <a:endParaRPr lang="en-US" sz="6900" dirty="0"/>
           </a:p>
         </p:txBody>
       </p:sp>
@@ -11345,7 +11312,7 @@
         </p:nvSpPr>
         <p:spPr>
           <a:xfrm>
-            <a:off x="914400" y="2400300"/>
+            <a:off x="914400" y="2495550"/>
             <a:ext cx="16459200" cy="485775"/>
           </a:xfrm>
           <a:prstGeom prst="rect">
@@ -12959,7 +12926,7 @@
         <p:spPr>
           <a:xfrm>
             <a:off x="914400" y="1333500"/>
-            <a:ext cx="16459200" cy="1047750"/>
+            <a:ext cx="16459200" cy="1143000"/>
           </a:xfrm>
           <a:prstGeom prst="rect">
             <a:avLst/>
@@ -12975,7 +12942,7 @@
               <a:buNone/>
             </a:pPr>
             <a:r>
-              <a:rPr lang="en-US" sz="6000" dirty="0" spc="-1" kern="0">
+              <a:rPr lang="en-US" sz="6900" dirty="0" spc="-2" kern="0">
                 <a:solidFill>
                   <a:srgbClr val="14161C"/>
                 </a:solidFill>
@@ -12983,10 +12950,10 @@
                 <a:ea typeface="Bricolage Grotesque ExtraBold" pitchFamily="34" charset="-122"/>
                 <a:cs typeface="Bricolage Grotesque ExtraBold" pitchFamily="34" charset="-120"/>
               </a:rPr>
-              <a:t>Hai chế</a:t>
-            </a:r>
-            <a:r>
-              <a:rPr lang="en-US" sz="6000" dirty="0" spc="-11" kern="0">
+              <a:t>Hai</a:t>
+            </a:r>
+            <a:r>
+              <a:rPr lang="en-US" sz="6900" dirty="0" spc="1" kern="0">
                 <a:solidFill>
                   <a:srgbClr val="14161C"/>
                 </a:solidFill>
@@ -12994,10 +12961,10 @@
                 <a:ea typeface="Bricolage Grotesque ExtraBold" pitchFamily="34" charset="-122"/>
                 <a:cs typeface="Bricolage Grotesque ExtraBold" pitchFamily="34" charset="-120"/>
               </a:rPr>
-              <a:t> độ,</a:t>
-            </a:r>
-            <a:r>
-              <a:rPr lang="en-US" sz="6000" dirty="0" spc="2" kern="0">
+              <a:t> chế</a:t>
+            </a:r>
+            <a:r>
+              <a:rPr lang="en-US" sz="6900" dirty="0" spc="-15" kern="0">
                 <a:solidFill>
                   <a:srgbClr val="14161C"/>
                 </a:solidFill>
@@ -13005,10 +12972,10 @@
                 <a:ea typeface="Bricolage Grotesque ExtraBold" pitchFamily="34" charset="-122"/>
                 <a:cs typeface="Bricolage Grotesque ExtraBold" pitchFamily="34" charset="-120"/>
               </a:rPr>
-              <a:t> hai</a:t>
-            </a:r>
-            <a:r>
-              <a:rPr lang="en-US" sz="6000" dirty="0" spc="-23" kern="0">
+              <a:t> độ,</a:t>
+            </a:r>
+            <a:r>
+              <a:rPr lang="en-US" sz="6900" dirty="0" spc="2" kern="0">
                 <a:solidFill>
                   <a:srgbClr val="14161C"/>
                 </a:solidFill>
@@ -13016,10 +12983,10 @@
                 <a:ea typeface="Bricolage Grotesque ExtraBold" pitchFamily="34" charset="-122"/>
                 <a:cs typeface="Bricolage Grotesque ExtraBold" pitchFamily="34" charset="-120"/>
               </a:rPr>
-              <a:t> thời</a:t>
-            </a:r>
-            <a:r>
-              <a:rPr lang="en-US" sz="6000" dirty="0" spc="21" kern="0">
+              <a:t> hai</a:t>
+            </a:r>
+            <a:r>
+              <a:rPr lang="en-US" sz="6900" dirty="0" spc="-25" kern="0">
                 <a:solidFill>
                   <a:srgbClr val="14161C"/>
                 </a:solidFill>
@@ -13027,9 +12994,20 @@
                 <a:ea typeface="Bricolage Grotesque ExtraBold" pitchFamily="34" charset="-122"/>
                 <a:cs typeface="Bricolage Grotesque ExtraBold" pitchFamily="34" charset="-120"/>
               </a:rPr>
+              <a:t> thời</a:t>
+            </a:r>
+            <a:r>
+              <a:rPr lang="en-US" sz="6900" dirty="0" spc="25" kern="0">
+                <a:solidFill>
+                  <a:srgbClr val="14161C"/>
+                </a:solidFill>
+                <a:latin typeface="Bricolage Grotesque ExtraBold" pitchFamily="34" charset="0"/>
+                <a:ea typeface="Bricolage Grotesque ExtraBold" pitchFamily="34" charset="-122"/>
+                <a:cs typeface="Bricolage Grotesque ExtraBold" pitchFamily="34" charset="-120"/>
+              </a:rPr>
               <a:t> điểm</a:t>
             </a:r>
-            <a:endParaRPr lang="en-US" sz="6000" dirty="0"/>
+            <a:endParaRPr lang="en-US" sz="6900" dirty="0"/>
           </a:p>
         </p:txBody>
       </p:sp>

--- a/system-design-101/vi/lessons/sd-04-038/slides/sd-04-038.pptx
+++ b/system-design-101/vi/lessons/sd-04-038/slides/sd-04-038.pptx
@@ -2063,7 +2063,7 @@
         </p:nvSpPr>
         <p:spPr>
           <a:xfrm>
-            <a:off x="10477500" y="914400"/>
+            <a:off x="10477500" y="1295400"/>
             <a:ext cx="6896100" cy="2381250"/>
           </a:xfrm>
           <a:prstGeom prst="roundRect">
@@ -2090,7 +2090,7 @@
         </p:nvSpPr>
         <p:spPr>
           <a:xfrm>
-            <a:off x="10858500" y="1143000"/>
+            <a:off x="10858500" y="1524000"/>
             <a:ext cx="1143000" cy="1562100"/>
           </a:xfrm>
           <a:prstGeom prst="rect">
@@ -2129,7 +2129,7 @@
         </p:nvSpPr>
         <p:spPr>
           <a:xfrm>
-            <a:off x="12192000" y="1295400"/>
+            <a:off x="12192000" y="1676400"/>
             <a:ext cx="4953000" cy="590550"/>
           </a:xfrm>
           <a:prstGeom prst="rect">
@@ -2179,7 +2179,7 @@
         </p:nvSpPr>
         <p:spPr>
           <a:xfrm>
-            <a:off x="12192000" y="1809750"/>
+            <a:off x="12192000" y="2190750"/>
             <a:ext cx="4857750" cy="1143000"/>
           </a:xfrm>
           <a:prstGeom prst="rect">
@@ -2298,7 +2298,7 @@
         </p:nvSpPr>
         <p:spPr>
           <a:xfrm>
-            <a:off x="10477500" y="3524250"/>
+            <a:off x="10477500" y="3905250"/>
             <a:ext cx="6896100" cy="2381250"/>
           </a:xfrm>
           <a:prstGeom prst="roundRect">
@@ -2325,7 +2325,7 @@
         </p:nvSpPr>
         <p:spPr>
           <a:xfrm>
-            <a:off x="10858500" y="3752850"/>
+            <a:off x="10858500" y="4133850"/>
             <a:ext cx="1143000" cy="1562100"/>
           </a:xfrm>
           <a:prstGeom prst="rect">
@@ -2364,7 +2364,7 @@
         </p:nvSpPr>
         <p:spPr>
           <a:xfrm>
-            <a:off x="12192000" y="3905250"/>
+            <a:off x="12192000" y="4286250"/>
             <a:ext cx="4953000" cy="590550"/>
           </a:xfrm>
           <a:prstGeom prst="rect">
@@ -2414,7 +2414,7 @@
         </p:nvSpPr>
         <p:spPr>
           <a:xfrm>
-            <a:off x="12192000" y="4419600"/>
+            <a:off x="12192000" y="4800600"/>
             <a:ext cx="4857750" cy="1143000"/>
           </a:xfrm>
           <a:prstGeom prst="rect">
@@ -2544,7 +2544,7 @@
         </p:nvSpPr>
         <p:spPr>
           <a:xfrm>
-            <a:off x="10477500" y="6134100"/>
+            <a:off x="10477500" y="6515100"/>
             <a:ext cx="6896100" cy="2381250"/>
           </a:xfrm>
           <a:prstGeom prst="roundRect">
@@ -2571,7 +2571,7 @@
         </p:nvSpPr>
         <p:spPr>
           <a:xfrm>
-            <a:off x="10858500" y="6362700"/>
+            <a:off x="10858500" y="6743700"/>
             <a:ext cx="1143000" cy="1562100"/>
           </a:xfrm>
           <a:prstGeom prst="rect">
@@ -2610,7 +2610,7 @@
         </p:nvSpPr>
         <p:spPr>
           <a:xfrm>
-            <a:off x="12192000" y="6515100"/>
+            <a:off x="12192000" y="6896100"/>
             <a:ext cx="4953000" cy="590550"/>
           </a:xfrm>
           <a:prstGeom prst="rect">
@@ -2671,7 +2671,7 @@
         </p:nvSpPr>
         <p:spPr>
           <a:xfrm>
-            <a:off x="12192000" y="7029450"/>
+            <a:off x="12192000" y="7410450"/>
             <a:ext cx="4857750" cy="1143000"/>
           </a:xfrm>
           <a:prstGeom prst="rect">
@@ -10263,7 +10263,7 @@
               <a:buNone/>
             </a:pPr>
             <a:r>
-              <a:rPr lang="en-US" sz="1950" dirty="0" spc="-6" kern="0">
+              <a:rPr lang="en-US" sz="1950" dirty="0" spc="-7" kern="0">
                 <a:solidFill>
                   <a:srgbClr val="9AA0B5"/>
                 </a:solidFill>
@@ -10271,10 +10271,10 @@
                 <a:ea typeface="Be Vietnam Pro" pitchFamily="34" charset="-122"/>
                 <a:cs typeface="Be Vietnam Pro" pitchFamily="34" charset="-120"/>
               </a:rPr>
-              <a:t>Đọc</a:t>
-            </a:r>
-            <a:r>
-              <a:rPr lang="en-US" sz="1950" dirty="0" spc="-7" kern="0">
+              <a:t>Thấy</a:t>
+            </a:r>
+            <a:r>
+              <a:rPr lang="en-US" sz="1950" dirty="0" spc="0" kern="0">
                 <a:solidFill>
                   <a:srgbClr val="9AA0B5"/>
                 </a:solidFill>
@@ -10282,10 +10282,10 @@
                 <a:ea typeface="Be Vietnam Pro" pitchFamily="34" charset="-122"/>
                 <a:cs typeface="Be Vietnam Pro" pitchFamily="34" charset="-120"/>
               </a:rPr>
-              <a:t> thấy</a:t>
-            </a:r>
-            <a:r>
-              <a:rPr lang="en-US" sz="1950" dirty="0" spc="-1" kern="0">
+              <a:t> lần</a:t>
+            </a:r>
+            <a:r>
+              <a:rPr lang="en-US" sz="1950" dirty="0" spc="1" kern="0">
                 <a:solidFill>
                   <a:srgbClr val="9AA0B5"/>
                 </a:solidFill>
@@ -10293,10 +10293,10 @@
                 <a:ea typeface="Be Vietnam Pro" pitchFamily="34" charset="-122"/>
                 <a:cs typeface="Be Vietnam Pro" pitchFamily="34" charset="-120"/>
               </a:rPr>
-              <a:t> lần</a:t>
-            </a:r>
-            <a:r>
-              <a:rPr lang="en-US" sz="1950" dirty="0" spc="1" kern="0">
+              <a:t> ghi</a:t>
+            </a:r>
+            <a:r>
+              <a:rPr lang="en-US" sz="1950" dirty="0" spc="0" kern="0">
                 <a:solidFill>
                   <a:srgbClr val="9AA0B5"/>
                 </a:solidFill>
@@ -10304,10 +10304,10 @@
                 <a:ea typeface="Be Vietnam Pro" pitchFamily="34" charset="-122"/>
                 <a:cs typeface="Be Vietnam Pro" pitchFamily="34" charset="-120"/>
               </a:rPr>
-              <a:t> ghi</a:t>
-            </a:r>
-            <a:r>
-              <a:rPr lang="en-US" sz="1950" dirty="0" spc="0" kern="0">
+              <a:t> mới</a:t>
+            </a:r>
+            <a:r>
+              <a:rPr lang="en-US" sz="1950" dirty="0" spc="-8" kern="0">
                 <a:solidFill>
                   <a:srgbClr val="9AA0B5"/>
                 </a:solidFill>
@@ -10315,10 +10315,10 @@
                 <a:ea typeface="Be Vietnam Pro" pitchFamily="34" charset="-122"/>
                 <a:cs typeface="Be Vietnam Pro" pitchFamily="34" charset="-120"/>
               </a:rPr>
-              <a:t> mới</a:t>
-            </a:r>
-            <a:r>
-              <a:rPr lang="en-US" sz="1950" dirty="0" spc="-8" kern="0">
+              <a:t> nhất</a:t>
+            </a:r>
+            <a:r>
+              <a:rPr lang="en-US" sz="1950" dirty="0" spc="-2" kern="0">
                 <a:solidFill>
                   <a:srgbClr val="9AA0B5"/>
                 </a:solidFill>
@@ -10326,10 +10326,10 @@
                 <a:ea typeface="Be Vietnam Pro" pitchFamily="34" charset="-122"/>
                 <a:cs typeface="Be Vietnam Pro" pitchFamily="34" charset="-120"/>
               </a:rPr>
-              <a:t> nhất</a:t>
-            </a:r>
-            <a:r>
-              <a:rPr lang="en-US" sz="1950" dirty="0" spc="-2" kern="0">
+              <a:t> ·</a:t>
+            </a:r>
+            <a:r>
+              <a:rPr lang="en-US" sz="1950" dirty="0" spc="2" kern="0">
                 <a:solidFill>
                   <a:srgbClr val="9AA0B5"/>
                 </a:solidFill>
@@ -10337,10 +10337,10 @@
                 <a:ea typeface="Be Vietnam Pro" pitchFamily="34" charset="-122"/>
                 <a:cs typeface="Be Vietnam Pro" pitchFamily="34" charset="-120"/>
               </a:rPr>
-              <a:t> ·</a:t>
-            </a:r>
-            <a:r>
-              <a:rPr lang="en-US" sz="1950" dirty="0" spc="2" kern="0">
+              <a:t> giữ đúng</a:t>
+            </a:r>
+            <a:r>
+              <a:rPr lang="en-US" sz="1950" dirty="0" spc="-14" kern="0">
                 <a:solidFill>
                   <a:srgbClr val="9AA0B5"/>
                 </a:solidFill>
@@ -10348,32 +10348,10 @@
                 <a:ea typeface="Be Vietnam Pro" pitchFamily="34" charset="-122"/>
                 <a:cs typeface="Be Vietnam Pro" pitchFamily="34" charset="-120"/>
               </a:rPr>
-              <a:t> giữ</a:t>
-            </a:r>
-            <a:r>
-              <a:rPr lang="en-US" sz="1950" dirty="0" spc="3" kern="0">
-                <a:solidFill>
-                  <a:srgbClr val="9AA0B5"/>
-                </a:solidFill>
-                <a:latin typeface="Be Vietnam Pro" pitchFamily="34" charset="0"/>
-                <a:ea typeface="Be Vietnam Pro" pitchFamily="34" charset="-122"/>
-                <a:cs typeface="Be Vietnam Pro" pitchFamily="34" charset="-120"/>
-              </a:rPr>
-              <a:t> đúng</a:t>
-            </a:r>
-            <a:r>
-              <a:rPr lang="en-US" sz="1950" dirty="0" spc="-15" kern="0">
-                <a:solidFill>
-                  <a:srgbClr val="9AA0B5"/>
-                </a:solidFill>
-                <a:latin typeface="Be Vietnam Pro" pitchFamily="34" charset="0"/>
-                <a:ea typeface="Be Vietnam Pro" pitchFamily="34" charset="-122"/>
-                <a:cs typeface="Be Vietnam Pro" pitchFamily="34" charset="-120"/>
-              </a:rPr>
               <a:t> ràng</a:t>
             </a:r>
             <a:r>
-              <a:rPr lang="en-US" sz="1950" dirty="0" spc="-3" kern="0">
+              <a:rPr lang="en-US" sz="1950" dirty="0" spc="-4" kern="0">
                 <a:solidFill>
                   <a:srgbClr val="9AA0B5"/>
                 </a:solidFill>
@@ -14156,17 +14134,6 @@
                 <a:cs typeface="Be Vietnam Pro" pitchFamily="34" charset="-120"/>
               </a:rPr>
               <a:t> ·</a:t>
-            </a:r>
-            <a:r>
-              <a:rPr lang="en-US" sz="2100" dirty="0" spc="0" kern="0">
-                <a:solidFill>
-                  <a:srgbClr val="6B6A66"/>
-                </a:solidFill>
-                <a:latin typeface="Be Vietnam Pro" pitchFamily="34" charset="0"/>
-                <a:ea typeface="Be Vietnam Pro" pitchFamily="34" charset="-122"/>
-                <a:cs typeface="Be Vietnam Pro" pitchFamily="34" charset="-120"/>
-              </a:rPr>
-              <a:t> chỉ</a:t>
             </a:r>
             <a:r>
               <a:rPr lang="en-US" sz="2100" dirty="0" spc="-17" kern="0">
